--- a/slide/themes/src/20_geometry.pptx
+++ b/slide/themes/src/20_geometry.pptx
@@ -12233,66 +12233,31 @@
                 <a:solidFill>
                   <a:schemeClr val="tx2"/>
                 </a:solidFill>
-                <a:latin typeface="Verdana"/>
-                <a:ea typeface="Verdana"/>
-                <a:cs typeface="Verdana"/>
               </a:defRPr>
             </a:lvl1pPr>
             <a:lvl2pPr>
-              <a:defRPr sz="4000">
-                <a:latin typeface="Verdana"/>
-                <a:ea typeface="Verdana"/>
-                <a:cs typeface="Verdana"/>
-              </a:defRPr>
+              <a:defRPr sz="4000"/>
             </a:lvl2pPr>
             <a:lvl3pPr>
-              <a:defRPr sz="4000">
-                <a:latin typeface="Verdana"/>
-                <a:ea typeface="Verdana"/>
-                <a:cs typeface="Verdana"/>
-              </a:defRPr>
+              <a:defRPr sz="4000"/>
             </a:lvl3pPr>
             <a:lvl4pPr>
-              <a:defRPr sz="4000">
-                <a:latin typeface="Verdana"/>
-                <a:ea typeface="Verdana"/>
-                <a:cs typeface="Verdana"/>
-              </a:defRPr>
+              <a:defRPr sz="4000"/>
             </a:lvl4pPr>
             <a:lvl5pPr>
-              <a:defRPr sz="4000">
-                <a:latin typeface="Verdana"/>
-                <a:ea typeface="Verdana"/>
-                <a:cs typeface="Verdana"/>
-              </a:defRPr>
+              <a:defRPr sz="4000"/>
             </a:lvl5pPr>
             <a:lvl6pPr>
-              <a:defRPr sz="4000">
-                <a:latin typeface="Verdana"/>
-                <a:ea typeface="Verdana"/>
-                <a:cs typeface="Verdana"/>
-              </a:defRPr>
+              <a:defRPr sz="4000"/>
             </a:lvl6pPr>
             <a:lvl7pPr>
-              <a:defRPr sz="4000">
-                <a:latin typeface="Verdana"/>
-                <a:ea typeface="Verdana"/>
-                <a:cs typeface="Verdana"/>
-              </a:defRPr>
+              <a:defRPr sz="4000"/>
             </a:lvl7pPr>
             <a:lvl8pPr>
-              <a:defRPr sz="4000">
-                <a:latin typeface="Verdana"/>
-                <a:ea typeface="Verdana"/>
-                <a:cs typeface="Verdana"/>
-              </a:defRPr>
+              <a:defRPr sz="4000"/>
             </a:lvl8pPr>
             <a:lvl9pPr>
-              <a:defRPr sz="4000">
-                <a:latin typeface="Verdana"/>
-                <a:ea typeface="Verdana"/>
-                <a:cs typeface="Verdana"/>
-              </a:defRPr>
+              <a:defRPr sz="4000"/>
             </a:lvl9pPr>
           </a:lstStyle>
           <a:p>
@@ -13004,13 +12969,13 @@
     </a:clrScheme>
     <a:fontScheme name="Office Theme">
       <a:majorFont>
-        <a:latin typeface="Arial"/>
-        <a:ea typeface="SimSun"/>
-        <a:cs typeface="Arial"/>
+        <a:latin typeface="Verdana"/>
+        <a:ea typeface="Microsoft YaHei"/>
+        <a:cs typeface="Tahoma"/>
       </a:majorFont>
       <a:minorFont>
         <a:latin typeface="Arial"/>
-        <a:ea typeface="SimSun"/>
+        <a:ea typeface="Microsoft YaHei"/>
         <a:cs typeface="Arial"/>
       </a:minorFont>
     </a:fontScheme>
@@ -13241,13 +13206,13 @@
     </a:clrScheme>
     <a:fontScheme name="Arial">
       <a:majorFont>
-        <a:latin typeface="Arial"/>
-        <a:ea typeface="Arial"/>
-        <a:cs typeface="Arial"/>
+        <a:latin typeface="Verdana"/>
+        <a:ea typeface="Microsoft YaHei"/>
+        <a:cs typeface="Tahoma"/>
       </a:majorFont>
       <a:minorFont>
         <a:latin typeface="Arial"/>
-        <a:ea typeface="Arial"/>
+        <a:ea typeface="Microsoft YaHei"/>
         <a:cs typeface="Arial"/>
       </a:minorFont>
     </a:fontScheme>

--- a/slide/themes/src/20_geometry.pptx
+++ b/slide/themes/src/20_geometry.pptx
@@ -536,10 +536,7 @@
             <a:pPr>
               <a:defRPr/>
             </a:pPr>
-            <a:endParaRPr lang="en-US">
-              <a:latin typeface="Arial"/>
-              <a:cs typeface="Arial"/>
-            </a:endParaRPr>
+            <a:endParaRPr lang="en-US"/>
           </a:p>
         </p:txBody>
       </p:sp>
